--- a/Damareen-MEGPROBALTUK.pptx
+++ b/Damareen-MEGPROBALTUK.pptx
@@ -5,16 +5,17 @@
     <p:sldMasterId id="2147483648" r:id="rId1"/>
   </p:sldMasterIdLst>
   <p:notesMasterIdLst>
-    <p:notesMasterId r:id="rId9"/>
+    <p:notesMasterId r:id="rId10"/>
   </p:notesMasterIdLst>
   <p:sldIdLst>
     <p:sldId id="256" r:id="rId2"/>
     <p:sldId id="257" r:id="rId3"/>
     <p:sldId id="258" r:id="rId4"/>
     <p:sldId id="259" r:id="rId5"/>
-    <p:sldId id="260" r:id="rId6"/>
-    <p:sldId id="261" r:id="rId7"/>
-    <p:sldId id="262" r:id="rId8"/>
+    <p:sldId id="263" r:id="rId6"/>
+    <p:sldId id="260" r:id="rId7"/>
+    <p:sldId id="261" r:id="rId8"/>
+    <p:sldId id="262" r:id="rId9"/>
   </p:sldIdLst>
   <p:sldSz cx="12192000" cy="6858000"/>
   <p:notesSz cx="6858000" cy="9144000"/>
@@ -858,7 +859,13 @@
   <p:cSld>
     <p:spTree>
       <p:nvGrpSpPr>
-        <p:cNvPr id="1" name=""/>
+        <p:cNvPr id="1" name="">
+          <a:extLst>
+            <a:ext uri="{FF2B5EF4-FFF2-40B4-BE49-F238E27FC236}">
+              <a16:creationId xmlns:a16="http://schemas.microsoft.com/office/drawing/2014/main" id="{CAD8B041-F5D8-87B5-EC82-60EEC2D165E0}"/>
+            </a:ext>
+          </a:extLst>
+        </p:cNvPr>
         <p:cNvGrpSpPr/>
         <p:nvPr/>
       </p:nvGrpSpPr>
@@ -872,7 +879,13 @@
       </p:grpSpPr>
       <p:sp>
         <p:nvSpPr>
-          <p:cNvPr id="596841002" name="Slide Image Placeholder 1"/>
+          <p:cNvPr id="68384533" name="Slide Image Placeholder 1">
+            <a:extLst>
+              <a:ext uri="{FF2B5EF4-FFF2-40B4-BE49-F238E27FC236}">
+                <a16:creationId xmlns:a16="http://schemas.microsoft.com/office/drawing/2014/main" id="{919EF274-17AF-7F9B-A51D-227781E79ED4}"/>
+              </a:ext>
+            </a:extLst>
+          </p:cNvPr>
           <p:cNvSpPr>
             <a:spLocks noGrp="1" noRot="1" noChangeAspect="1"/>
           </p:cNvSpPr>
@@ -884,7 +897,13 @@
       </p:sp>
       <p:sp>
         <p:nvSpPr>
-          <p:cNvPr id="1829430597" name="Notes Placeholder 2"/>
+          <p:cNvPr id="705541321" name="Notes Placeholder 2">
+            <a:extLst>
+              <a:ext uri="{FF2B5EF4-FFF2-40B4-BE49-F238E27FC236}">
+                <a16:creationId xmlns:a16="http://schemas.microsoft.com/office/drawing/2014/main" id="{65C3F413-2063-8800-C955-6A7A44EFE45F}"/>
+              </a:ext>
+            </a:extLst>
+          </p:cNvPr>
           <p:cNvSpPr>
             <a:spLocks noGrp="1"/>
           </p:cNvSpPr>
@@ -906,7 +925,13 @@
       </p:sp>
       <p:sp>
         <p:nvSpPr>
-          <p:cNvPr id="172552001" name="Slide Number Placeholder 3"/>
+          <p:cNvPr id="1941837733" name="Slide Number Placeholder 3">
+            <a:extLst>
+              <a:ext uri="{FF2B5EF4-FFF2-40B4-BE49-F238E27FC236}">
+                <a16:creationId xmlns:a16="http://schemas.microsoft.com/office/drawing/2014/main" id="{2F44CBDB-5F70-5381-D3F4-07BC88CA9099}"/>
+              </a:ext>
+            </a:extLst>
+          </p:cNvPr>
           <p:cNvSpPr>
             <a:spLocks noGrp="1"/>
           </p:cNvSpPr>
@@ -922,7 +947,7 @@
             <a:pPr>
               <a:defRPr/>
             </a:pPr>
-            <a:fld id="{12AFA12C-F677-7BF3-FA33-E59D2659F934}" type="slidenum">
+            <a:fld id="{3C53AC74-33C7-0B7D-491D-A3E1CD882BE5}" type="slidenum">
               <a:rPr/>
               <a:t>5</a:t>
             </a:fld>
@@ -931,6 +956,11 @@
         </p:txBody>
       </p:sp>
     </p:spTree>
+    <p:extLst>
+      <p:ext uri="{BB962C8B-B14F-4D97-AF65-F5344CB8AC3E}">
+        <p14:creationId xmlns:p14="http://schemas.microsoft.com/office/powerpoint/2010/main" val="4194087726"/>
+      </p:ext>
+    </p:extLst>
   </p:cSld>
   <p:clrMapOvr>
     <a:masterClrMapping/>
@@ -957,7 +987,7 @@
       </p:grpSpPr>
       <p:sp>
         <p:nvSpPr>
-          <p:cNvPr id="2" name="Slide Image Placeholder 1"/>
+          <p:cNvPr id="596841002" name="Slide Image Placeholder 1"/>
           <p:cNvSpPr>
             <a:spLocks noGrp="1" noRot="1" noChangeAspect="1"/>
           </p:cNvSpPr>
@@ -969,7 +999,7 @@
       </p:sp>
       <p:sp>
         <p:nvSpPr>
-          <p:cNvPr id="3" name="Notes Placeholder 2"/>
+          <p:cNvPr id="1829430597" name="Notes Placeholder 2"/>
           <p:cNvSpPr>
             <a:spLocks noGrp="1"/>
           </p:cNvSpPr>
@@ -991,7 +1021,7 @@
       </p:sp>
       <p:sp>
         <p:nvSpPr>
-          <p:cNvPr id="4" name="Slide Number Placeholder 3"/>
+          <p:cNvPr id="172552001" name="Slide Number Placeholder 3"/>
           <p:cNvSpPr>
             <a:spLocks noGrp="1"/>
           </p:cNvSpPr>
@@ -1007,7 +1037,7 @@
             <a:pPr>
               <a:defRPr/>
             </a:pPr>
-            <a:fld id="{8415A593-09D9-1481-DC88-4B40AF24AEAD}" type="slidenum">
+            <a:fld id="{12AFA12C-F677-7BF3-FA33-E59D2659F934}" type="slidenum">
               <a:rPr/>
               <a:t>6</a:t>
             </a:fld>
@@ -1042,7 +1072,7 @@
       </p:grpSpPr>
       <p:sp>
         <p:nvSpPr>
-          <p:cNvPr id="800841814" name="Slide Image Placeholder 1"/>
+          <p:cNvPr id="2" name="Slide Image Placeholder 1"/>
           <p:cNvSpPr>
             <a:spLocks noGrp="1" noRot="1" noChangeAspect="1"/>
           </p:cNvSpPr>
@@ -1054,7 +1084,7 @@
       </p:sp>
       <p:sp>
         <p:nvSpPr>
-          <p:cNvPr id="933770117" name="Notes Placeholder 2"/>
+          <p:cNvPr id="3" name="Notes Placeholder 2"/>
           <p:cNvSpPr>
             <a:spLocks noGrp="1"/>
           </p:cNvSpPr>
@@ -1076,7 +1106,7 @@
       </p:sp>
       <p:sp>
         <p:nvSpPr>
-          <p:cNvPr id="41806603" name="Slide Number Placeholder 3"/>
+          <p:cNvPr id="4" name="Slide Number Placeholder 3"/>
           <p:cNvSpPr>
             <a:spLocks noGrp="1"/>
           </p:cNvSpPr>
@@ -1092,9 +1122,94 @@
             <a:pPr>
               <a:defRPr/>
             </a:pPr>
+            <a:fld id="{8415A593-09D9-1481-DC88-4B40AF24AEAD}" type="slidenum">
+              <a:rPr/>
+              <a:t>7</a:t>
+            </a:fld>
+            <a:endParaRPr/>
+          </a:p>
+        </p:txBody>
+      </p:sp>
+    </p:spTree>
+  </p:cSld>
+  <p:clrMapOvr>
+    <a:masterClrMapping/>
+  </p:clrMapOvr>
+</p:notes>
+</file>
+
+<file path=ppt/notesSlides/notesSlide8.xml><?xml version="1.0" encoding="utf-8"?>
+<p:notes xmlns:a="http://schemas.openxmlformats.org/drawingml/2006/main" xmlns:r="http://schemas.openxmlformats.org/officeDocument/2006/relationships" xmlns:p="http://schemas.openxmlformats.org/presentationml/2006/main">
+  <p:cSld>
+    <p:spTree>
+      <p:nvGrpSpPr>
+        <p:cNvPr id="1" name=""/>
+        <p:cNvGrpSpPr/>
+        <p:nvPr/>
+      </p:nvGrpSpPr>
+      <p:grpSpPr bwMode="auto">
+        <a:xfrm>
+          <a:off x="0" y="0"/>
+          <a:ext cx="0" cy="0"/>
+          <a:chOff x="0" y="0"/>
+          <a:chExt cx="0" cy="0"/>
+        </a:xfrm>
+      </p:grpSpPr>
+      <p:sp>
+        <p:nvSpPr>
+          <p:cNvPr id="800841814" name="Slide Image Placeholder 1"/>
+          <p:cNvSpPr>
+            <a:spLocks noGrp="1" noRot="1" noChangeAspect="1"/>
+          </p:cNvSpPr>
+          <p:nvPr>
+            <p:ph type="sldImg"/>
+          </p:nvPr>
+        </p:nvSpPr>
+        <p:spPr bwMode="auto"/>
+      </p:sp>
+      <p:sp>
+        <p:nvSpPr>
+          <p:cNvPr id="933770117" name="Notes Placeholder 2"/>
+          <p:cNvSpPr>
+            <a:spLocks noGrp="1"/>
+          </p:cNvSpPr>
+          <p:nvPr>
+            <p:ph type="body" idx="1"/>
+          </p:nvPr>
+        </p:nvSpPr>
+        <p:spPr bwMode="auto"/>
+        <p:txBody>
+          <a:bodyPr/>
+          <a:lstStyle/>
+          <a:p>
+            <a:pPr>
+              <a:defRPr/>
+            </a:pPr>
+            <a:endParaRPr/>
+          </a:p>
+        </p:txBody>
+      </p:sp>
+      <p:sp>
+        <p:nvSpPr>
+          <p:cNvPr id="41806603" name="Slide Number Placeholder 3"/>
+          <p:cNvSpPr>
+            <a:spLocks noGrp="1"/>
+          </p:cNvSpPr>
+          <p:nvPr>
+            <p:ph type="sldNum" sz="quarter" idx="10"/>
+          </p:nvPr>
+        </p:nvSpPr>
+        <p:spPr bwMode="auto"/>
+        <p:txBody>
+          <a:bodyPr/>
+          <a:lstStyle/>
+          <a:p>
+            <a:pPr>
+              <a:defRPr/>
+            </a:pPr>
             <a:fld id="{6B53C180-FF2D-64B4-0476-B0FEA942FC1F}" type="slidenum">
               <a:rPr/>
-              <a:t>7</a:t>
+              <a:t>8</a:t>
             </a:fld>
             <a:endParaRPr/>
           </a:p>
@@ -4784,7 +4899,7 @@
         <p:fade/>
       </p:transition>
     </mc:Choice>
-    <mc:Fallback xmlns="" xmlns:m="http://schemas.openxmlformats.org/officeDocument/2006/math" xmlns:w="http://schemas.openxmlformats.org/wordprocessingml/2006/main">
+    <mc:Fallback xmlns:w="http://schemas.openxmlformats.org/wordprocessingml/2006/main" xmlns:m="http://schemas.openxmlformats.org/officeDocument/2006/math" xmlns="">
       <p:transition spd="med" advClick="1">
         <p:fade thruBlk="0"/>
       </p:transition>
@@ -5260,7 +5375,7 @@
         <p:fade/>
       </p:transition>
     </mc:Choice>
-    <mc:Fallback xmlns="" xmlns:m="http://schemas.openxmlformats.org/officeDocument/2006/math" xmlns:w="http://schemas.openxmlformats.org/wordprocessingml/2006/main">
+    <mc:Fallback xmlns:w="http://schemas.openxmlformats.org/wordprocessingml/2006/main" xmlns:m="http://schemas.openxmlformats.org/officeDocument/2006/math" xmlns="">
       <p:transition spd="med" advClick="1">
         <p:fade thruBlk="0"/>
       </p:transition>
@@ -5775,7 +5890,7 @@
         <p:fade/>
       </p:transition>
     </mc:Choice>
-    <mc:Fallback xmlns="" xmlns:m="http://schemas.openxmlformats.org/officeDocument/2006/math" xmlns:w="http://schemas.openxmlformats.org/wordprocessingml/2006/main">
+    <mc:Fallback xmlns:w="http://schemas.openxmlformats.org/wordprocessingml/2006/main" xmlns:m="http://schemas.openxmlformats.org/officeDocument/2006/math" xmlns="">
       <p:transition spd="med" advClick="1">
         <p:fade thruBlk="0"/>
       </p:transition>
@@ -6109,6 +6224,673 @@
 </file>
 
 <file path=ppt/slides/slide5.xml><?xml version="1.0" encoding="utf-8"?>
+<p:sld xmlns:a="http://schemas.openxmlformats.org/drawingml/2006/main" xmlns:r="http://schemas.openxmlformats.org/officeDocument/2006/relationships" xmlns:p="http://schemas.openxmlformats.org/presentationml/2006/main" showMasterPhAnim="0">
+  <p:cSld>
+    <p:bg>
+      <p:bgPr>
+        <a:solidFill>
+          <a:srgbClr val="09090B"/>
+        </a:solidFill>
+        <a:effectLst/>
+      </p:bgPr>
+    </p:bg>
+    <p:spTree>
+      <p:nvGrpSpPr>
+        <p:cNvPr id="1" name="">
+          <a:extLst>
+            <a:ext uri="{FF2B5EF4-FFF2-40B4-BE49-F238E27FC236}">
+              <a16:creationId xmlns:a16="http://schemas.microsoft.com/office/drawing/2014/main" id="{B1C2BD5A-9716-7C81-694F-21577582A758}"/>
+            </a:ext>
+          </a:extLst>
+        </p:cNvPr>
+        <p:cNvGrpSpPr/>
+        <p:nvPr/>
+      </p:nvGrpSpPr>
+      <p:grpSpPr bwMode="auto">
+        <a:xfrm>
+          <a:off x="0" y="0"/>
+          <a:ext cx="0" cy="0"/>
+          <a:chOff x="0" y="0"/>
+          <a:chExt cx="0" cy="0"/>
+        </a:xfrm>
+      </p:grpSpPr>
+      <p:pic>
+        <p:nvPicPr>
+          <p:cNvPr id="14" name="Kép 13" descr="A képen képernyőkép, fekete látható&#10;&#10;Előfordulhat, hogy az AI által létrehozott tartalom helytelen.">
+            <a:extLst>
+              <a:ext uri="{FF2B5EF4-FFF2-40B4-BE49-F238E27FC236}">
+                <a16:creationId xmlns:a16="http://schemas.microsoft.com/office/drawing/2014/main" id="{061E8EE7-6E6D-2617-63BB-51F2EAEAE008}"/>
+              </a:ext>
+            </a:extLst>
+          </p:cNvPr>
+          <p:cNvPicPr>
+            <a:picLocks noChangeAspect="1"/>
+          </p:cNvPicPr>
+          <p:nvPr/>
+        </p:nvPicPr>
+        <p:blipFill>
+          <a:blip r:embed="rId3">
+            <a:extLst>
+              <a:ext uri="{28A0092B-C50C-407E-A947-70E740481C1C}">
+                <a14:useLocalDpi xmlns:a14="http://schemas.microsoft.com/office/drawing/2010/main" val="0"/>
+              </a:ext>
+            </a:extLst>
+          </a:blip>
+          <a:stretch>
+            <a:fillRect/>
+          </a:stretch>
+        </p:blipFill>
+        <p:spPr>
+          <a:xfrm>
+            <a:off x="381877" y="3505095"/>
+            <a:ext cx="2143125" cy="523875"/>
+          </a:xfrm>
+          <a:prstGeom prst="rect">
+            <a:avLst/>
+          </a:prstGeom>
+        </p:spPr>
+      </p:pic>
+      <p:pic>
+        <p:nvPicPr>
+          <p:cNvPr id="8" name="Kép 7" descr="A képen billentyűzet, Beviteli eszköz, képernyőkép, számítógép látható&#10;&#10;Előfordulhat, hogy az AI által létrehozott tartalom helytelen.">
+            <a:extLst>
+              <a:ext uri="{FF2B5EF4-FFF2-40B4-BE49-F238E27FC236}">
+                <a16:creationId xmlns:a16="http://schemas.microsoft.com/office/drawing/2014/main" id="{2FB54333-FEDB-69D0-E01C-5D88BC9D9125}"/>
+              </a:ext>
+            </a:extLst>
+          </p:cNvPr>
+          <p:cNvPicPr>
+            <a:picLocks noChangeAspect="1"/>
+          </p:cNvPicPr>
+          <p:nvPr/>
+        </p:nvPicPr>
+        <p:blipFill>
+          <a:blip r:embed="rId4">
+            <a:extLst>
+              <a:ext uri="{28A0092B-C50C-407E-A947-70E740481C1C}">
+                <a14:useLocalDpi xmlns:a14="http://schemas.microsoft.com/office/drawing/2010/main" val="0"/>
+              </a:ext>
+            </a:extLst>
+          </a:blip>
+          <a:stretch>
+            <a:fillRect/>
+          </a:stretch>
+        </p:blipFill>
+        <p:spPr>
+          <a:xfrm>
+            <a:off x="2485312" y="7649"/>
+            <a:ext cx="7221375" cy="1764000"/>
+          </a:xfrm>
+          <a:prstGeom prst="rect">
+            <a:avLst/>
+          </a:prstGeom>
+        </p:spPr>
+      </p:pic>
+      <p:pic>
+        <p:nvPicPr>
+          <p:cNvPr id="10" name="Kép 9" descr="A képen képernyőkép, tervezés látható&#10;&#10;Előfordulhat, hogy az AI által létrehozott tartalom helytelen.">
+            <a:extLst>
+              <a:ext uri="{FF2B5EF4-FFF2-40B4-BE49-F238E27FC236}">
+                <a16:creationId xmlns:a16="http://schemas.microsoft.com/office/drawing/2014/main" id="{16E10092-59AF-A2F1-E677-4A9BE45A31BF}"/>
+              </a:ext>
+            </a:extLst>
+          </p:cNvPr>
+          <p:cNvPicPr>
+            <a:picLocks noChangeAspect="1"/>
+          </p:cNvPicPr>
+          <p:nvPr/>
+        </p:nvPicPr>
+        <p:blipFill>
+          <a:blip r:embed="rId5">
+            <a:extLst>
+              <a:ext uri="{28A0092B-C50C-407E-A947-70E740481C1C}">
+                <a14:useLocalDpi xmlns:a14="http://schemas.microsoft.com/office/drawing/2010/main" val="0"/>
+              </a:ext>
+            </a:extLst>
+          </a:blip>
+          <a:stretch>
+            <a:fillRect/>
+          </a:stretch>
+        </p:blipFill>
+        <p:spPr>
+          <a:xfrm>
+            <a:off x="381877" y="2709860"/>
+            <a:ext cx="1838325" cy="523875"/>
+          </a:xfrm>
+          <a:prstGeom prst="rect">
+            <a:avLst/>
+          </a:prstGeom>
+        </p:spPr>
+      </p:pic>
+      <p:pic>
+        <p:nvPicPr>
+          <p:cNvPr id="12" name="Kép 11" descr="A képen képernyőkép, fekete látható&#10;&#10;Előfordulhat, hogy az AI által létrehozott tartalom helytelen.">
+            <a:extLst>
+              <a:ext uri="{FF2B5EF4-FFF2-40B4-BE49-F238E27FC236}">
+                <a16:creationId xmlns:a16="http://schemas.microsoft.com/office/drawing/2014/main" id="{DE7D56C5-7C42-E2C4-73EA-60DA2600AE1D}"/>
+              </a:ext>
+            </a:extLst>
+          </p:cNvPr>
+          <p:cNvPicPr>
+            <a:picLocks noChangeAspect="1"/>
+          </p:cNvPicPr>
+          <p:nvPr/>
+        </p:nvPicPr>
+        <p:blipFill>
+          <a:blip r:embed="rId6">
+            <a:extLst>
+              <a:ext uri="{28A0092B-C50C-407E-A947-70E740481C1C}">
+                <a14:useLocalDpi xmlns:a14="http://schemas.microsoft.com/office/drawing/2010/main" val="0"/>
+              </a:ext>
+            </a:extLst>
+          </a:blip>
+          <a:stretch>
+            <a:fillRect/>
+          </a:stretch>
+        </p:blipFill>
+        <p:spPr>
+          <a:xfrm>
+            <a:off x="381877" y="1909760"/>
+            <a:ext cx="1066800" cy="523875"/>
+          </a:xfrm>
+          <a:prstGeom prst="rect">
+            <a:avLst/>
+          </a:prstGeom>
+        </p:spPr>
+      </p:pic>
+      <p:pic>
+        <p:nvPicPr>
+          <p:cNvPr id="16" name="Kép 15" descr="A képen macska, clipart, Grafika látható&#10;&#10;Előfordulhat, hogy az AI által létrehozott tartalom helytelen.">
+            <a:extLst>
+              <a:ext uri="{FF2B5EF4-FFF2-40B4-BE49-F238E27FC236}">
+                <a16:creationId xmlns:a16="http://schemas.microsoft.com/office/drawing/2014/main" id="{4F72A617-53CF-9052-427A-36F443E9CDAD}"/>
+              </a:ext>
+            </a:extLst>
+          </p:cNvPr>
+          <p:cNvPicPr>
+            <a:picLocks noChangeAspect="1"/>
+          </p:cNvPicPr>
+          <p:nvPr/>
+        </p:nvPicPr>
+        <p:blipFill>
+          <a:blip r:embed="rId7" cstate="print">
+            <a:extLst>
+              <a:ext uri="{28A0092B-C50C-407E-A947-70E740481C1C}">
+                <a14:useLocalDpi xmlns:a14="http://schemas.microsoft.com/office/drawing/2010/main" val="0"/>
+              </a:ext>
+            </a:extLst>
+          </a:blip>
+          <a:stretch>
+            <a:fillRect/>
+          </a:stretch>
+        </p:blipFill>
+        <p:spPr>
+          <a:xfrm>
+            <a:off x="372013" y="4837261"/>
+            <a:ext cx="1848189" cy="1848189"/>
+          </a:xfrm>
+          <a:prstGeom prst="rect">
+            <a:avLst/>
+          </a:prstGeom>
+        </p:spPr>
+      </p:pic>
+      <p:pic>
+        <p:nvPicPr>
+          <p:cNvPr id="18" name="Kép 17" descr="A képen clipart, kör, Grafika, művészet látható&#10;&#10;Előfordulhat, hogy az AI által létrehozott tartalom helytelen.">
+            <a:extLst>
+              <a:ext uri="{FF2B5EF4-FFF2-40B4-BE49-F238E27FC236}">
+                <a16:creationId xmlns:a16="http://schemas.microsoft.com/office/drawing/2014/main" id="{F2C77323-6E56-9E93-41EA-0ED8269A9440}"/>
+              </a:ext>
+            </a:extLst>
+          </p:cNvPr>
+          <p:cNvPicPr>
+            <a:picLocks noChangeAspect="1"/>
+          </p:cNvPicPr>
+          <p:nvPr/>
+        </p:nvPicPr>
+        <p:blipFill>
+          <a:blip r:embed="rId8" cstate="print">
+            <a:extLst>
+              <a:ext uri="{28A0092B-C50C-407E-A947-70E740481C1C}">
+                <a14:useLocalDpi xmlns:a14="http://schemas.microsoft.com/office/drawing/2010/main" val="0"/>
+              </a:ext>
+            </a:extLst>
+          </a:blip>
+          <a:stretch>
+            <a:fillRect/>
+          </a:stretch>
+        </p:blipFill>
+        <p:spPr>
+          <a:xfrm>
+            <a:off x="2525002" y="4815170"/>
+            <a:ext cx="1892369" cy="1892369"/>
+          </a:xfrm>
+          <a:prstGeom prst="rect">
+            <a:avLst/>
+          </a:prstGeom>
+        </p:spPr>
+      </p:pic>
+      <p:pic>
+        <p:nvPicPr>
+          <p:cNvPr id="22" name="Ábra 21">
+            <a:extLst>
+              <a:ext uri="{FF2B5EF4-FFF2-40B4-BE49-F238E27FC236}">
+                <a16:creationId xmlns:a16="http://schemas.microsoft.com/office/drawing/2014/main" id="{AB120F9C-AD8F-067F-635A-885D74940405}"/>
+              </a:ext>
+            </a:extLst>
+          </p:cNvPr>
+          <p:cNvPicPr>
+            <a:picLocks noChangeAspect="1"/>
+          </p:cNvPicPr>
+          <p:nvPr/>
+        </p:nvPicPr>
+        <p:blipFill>
+          <a:blip r:embed="rId9">
+            <a:extLst>
+              <a:ext uri="{96DAC541-7B7A-43D3-8B79-37D633B846F1}">
+                <asvg:svgBlip xmlns:asvg="http://schemas.microsoft.com/office/drawing/2016/SVG/main" r:embed="rId10"/>
+              </a:ext>
+            </a:extLst>
+          </a:blip>
+          <a:stretch>
+            <a:fillRect/>
+          </a:stretch>
+        </p:blipFill>
+        <p:spPr>
+          <a:xfrm>
+            <a:off x="5361733" y="1569292"/>
+            <a:ext cx="6288154" cy="2805010"/>
+          </a:xfrm>
+          <a:prstGeom prst="rect">
+            <a:avLst/>
+          </a:prstGeom>
+        </p:spPr>
+      </p:pic>
+    </p:spTree>
+    <p:extLst>
+      <p:ext uri="{BB962C8B-B14F-4D97-AF65-F5344CB8AC3E}">
+        <p14:creationId xmlns:p14="http://schemas.microsoft.com/office/powerpoint/2010/main" val="110790809"/>
+      </p:ext>
+    </p:extLst>
+  </p:cSld>
+  <p:clrMapOvr>
+    <a:masterClrMapping/>
+  </p:clrMapOvr>
+  <p:transition>
+    <p:fade/>
+  </p:transition>
+  <p:timing>
+    <p:tnLst>
+      <p:par>
+        <p:cTn id="1" dur="indefinite" restart="never" nodeType="tmRoot">
+          <p:childTnLst>
+            <p:seq concurrent="1" nextAc="seek">
+              <p:cTn id="2" dur="indefinite" nodeType="mainSeq">
+                <p:childTnLst>
+                  <p:par>
+                    <p:cTn id="3" fill="hold">
+                      <p:stCondLst>
+                        <p:cond delay="indefinite"/>
+                        <p:cond evt="onBegin" delay="0">
+                          <p:tn val="2"/>
+                        </p:cond>
+                      </p:stCondLst>
+                      <p:childTnLst>
+                        <p:par>
+                          <p:cTn id="4" fill="hold">
+                            <p:stCondLst>
+                              <p:cond delay="0"/>
+                            </p:stCondLst>
+                            <p:childTnLst>
+                              <p:par>
+                                <p:cTn id="5" presetID="10" presetClass="entr" presetSubtype="0" fill="hold" nodeType="afterEffect">
+                                  <p:stCondLst>
+                                    <p:cond delay="0"/>
+                                  </p:stCondLst>
+                                  <p:childTnLst>
+                                    <p:set>
+                                      <p:cBhvr>
+                                        <p:cTn id="6" dur="1" fill="hold">
+                                          <p:stCondLst>
+                                            <p:cond delay="0"/>
+                                          </p:stCondLst>
+                                        </p:cTn>
+                                        <p:tgtEl>
+                                          <p:spTgt spid="8"/>
+                                        </p:tgtEl>
+                                        <p:attrNameLst>
+                                          <p:attrName>style.visibility</p:attrName>
+                                        </p:attrNameLst>
+                                      </p:cBhvr>
+                                      <p:to>
+                                        <p:strVal val="visible"/>
+                                      </p:to>
+                                    </p:set>
+                                    <p:animEffect transition="in" filter="fade">
+                                      <p:cBhvr>
+                                        <p:cTn id="7" dur="500"/>
+                                        <p:tgtEl>
+                                          <p:spTgt spid="8"/>
+                                        </p:tgtEl>
+                                      </p:cBhvr>
+                                    </p:animEffect>
+                                  </p:childTnLst>
+                                </p:cTn>
+                              </p:par>
+                            </p:childTnLst>
+                          </p:cTn>
+                        </p:par>
+                        <p:par>
+                          <p:cTn id="8" fill="hold">
+                            <p:stCondLst>
+                              <p:cond delay="500"/>
+                            </p:stCondLst>
+                            <p:childTnLst>
+                              <p:par>
+                                <p:cTn id="9" presetID="10" presetClass="entr" presetSubtype="0" fill="hold" nodeType="afterEffect">
+                                  <p:stCondLst>
+                                    <p:cond delay="0"/>
+                                  </p:stCondLst>
+                                  <p:childTnLst>
+                                    <p:set>
+                                      <p:cBhvr>
+                                        <p:cTn id="10" dur="1" fill="hold">
+                                          <p:stCondLst>
+                                            <p:cond delay="0"/>
+                                          </p:stCondLst>
+                                        </p:cTn>
+                                        <p:tgtEl>
+                                          <p:spTgt spid="12"/>
+                                        </p:tgtEl>
+                                        <p:attrNameLst>
+                                          <p:attrName>style.visibility</p:attrName>
+                                        </p:attrNameLst>
+                                      </p:cBhvr>
+                                      <p:to>
+                                        <p:strVal val="visible"/>
+                                      </p:to>
+                                    </p:set>
+                                    <p:animEffect transition="in" filter="fade">
+                                      <p:cBhvr>
+                                        <p:cTn id="11" dur="500"/>
+                                        <p:tgtEl>
+                                          <p:spTgt spid="12"/>
+                                        </p:tgtEl>
+                                      </p:cBhvr>
+                                    </p:animEffect>
+                                  </p:childTnLst>
+                                </p:cTn>
+                              </p:par>
+                            </p:childTnLst>
+                          </p:cTn>
+                        </p:par>
+                        <p:par>
+                          <p:cTn id="12" fill="hold">
+                            <p:stCondLst>
+                              <p:cond delay="1000"/>
+                            </p:stCondLst>
+                            <p:childTnLst>
+                              <p:par>
+                                <p:cTn id="13" presetID="10" presetClass="entr" presetSubtype="0" fill="hold" nodeType="afterEffect">
+                                  <p:stCondLst>
+                                    <p:cond delay="0"/>
+                                  </p:stCondLst>
+                                  <p:childTnLst>
+                                    <p:set>
+                                      <p:cBhvr>
+                                        <p:cTn id="14" dur="1" fill="hold">
+                                          <p:stCondLst>
+                                            <p:cond delay="0"/>
+                                          </p:stCondLst>
+                                        </p:cTn>
+                                        <p:tgtEl>
+                                          <p:spTgt spid="22"/>
+                                        </p:tgtEl>
+                                        <p:attrNameLst>
+                                          <p:attrName>style.visibility</p:attrName>
+                                        </p:attrNameLst>
+                                      </p:cBhvr>
+                                      <p:to>
+                                        <p:strVal val="visible"/>
+                                      </p:to>
+                                    </p:set>
+                                    <p:animEffect transition="in" filter="fade">
+                                      <p:cBhvr>
+                                        <p:cTn id="15" dur="500"/>
+                                        <p:tgtEl>
+                                          <p:spTgt spid="22"/>
+                                        </p:tgtEl>
+                                      </p:cBhvr>
+                                    </p:animEffect>
+                                  </p:childTnLst>
+                                </p:cTn>
+                              </p:par>
+                            </p:childTnLst>
+                          </p:cTn>
+                        </p:par>
+                      </p:childTnLst>
+                    </p:cTn>
+                  </p:par>
+                  <p:par>
+                    <p:cTn id="16" fill="hold">
+                      <p:stCondLst>
+                        <p:cond delay="indefinite"/>
+                      </p:stCondLst>
+                      <p:childTnLst>
+                        <p:par>
+                          <p:cTn id="17" fill="hold">
+                            <p:stCondLst>
+                              <p:cond delay="0"/>
+                            </p:stCondLst>
+                            <p:childTnLst>
+                              <p:par>
+                                <p:cTn id="18" presetID="10" presetClass="entr" presetSubtype="0" fill="hold" nodeType="clickEffect">
+                                  <p:stCondLst>
+                                    <p:cond delay="0"/>
+                                  </p:stCondLst>
+                                  <p:childTnLst>
+                                    <p:set>
+                                      <p:cBhvr>
+                                        <p:cTn id="19" dur="1" fill="hold">
+                                          <p:stCondLst>
+                                            <p:cond delay="0"/>
+                                          </p:stCondLst>
+                                        </p:cTn>
+                                        <p:tgtEl>
+                                          <p:spTgt spid="10"/>
+                                        </p:tgtEl>
+                                        <p:attrNameLst>
+                                          <p:attrName>style.visibility</p:attrName>
+                                        </p:attrNameLst>
+                                      </p:cBhvr>
+                                      <p:to>
+                                        <p:strVal val="visible"/>
+                                      </p:to>
+                                    </p:set>
+                                    <p:animEffect transition="in" filter="fade">
+                                      <p:cBhvr>
+                                        <p:cTn id="20" dur="500"/>
+                                        <p:tgtEl>
+                                          <p:spTgt spid="10"/>
+                                        </p:tgtEl>
+                                      </p:cBhvr>
+                                    </p:animEffect>
+                                  </p:childTnLst>
+                                </p:cTn>
+                              </p:par>
+                            </p:childTnLst>
+                          </p:cTn>
+                        </p:par>
+                        <p:par>
+                          <p:cTn id="21" fill="hold">
+                            <p:stCondLst>
+                              <p:cond delay="500"/>
+                            </p:stCondLst>
+                            <p:childTnLst>
+                              <p:par>
+                                <p:cTn id="22" presetID="10" presetClass="entr" presetSubtype="0" fill="hold" nodeType="afterEffect">
+                                  <p:stCondLst>
+                                    <p:cond delay="0"/>
+                                  </p:stCondLst>
+                                  <p:childTnLst>
+                                    <p:set>
+                                      <p:cBhvr>
+                                        <p:cTn id="23" dur="1" fill="hold">
+                                          <p:stCondLst>
+                                            <p:cond delay="0"/>
+                                          </p:stCondLst>
+                                        </p:cTn>
+                                        <p:tgtEl>
+                                          <p:spTgt spid="16"/>
+                                        </p:tgtEl>
+                                        <p:attrNameLst>
+                                          <p:attrName>style.visibility</p:attrName>
+                                        </p:attrNameLst>
+                                      </p:cBhvr>
+                                      <p:to>
+                                        <p:strVal val="visible"/>
+                                      </p:to>
+                                    </p:set>
+                                    <p:animEffect transition="in" filter="fade">
+                                      <p:cBhvr>
+                                        <p:cTn id="24" dur="500"/>
+                                        <p:tgtEl>
+                                          <p:spTgt spid="16"/>
+                                        </p:tgtEl>
+                                      </p:cBhvr>
+                                    </p:animEffect>
+                                  </p:childTnLst>
+                                </p:cTn>
+                              </p:par>
+                            </p:childTnLst>
+                          </p:cTn>
+                        </p:par>
+                      </p:childTnLst>
+                    </p:cTn>
+                  </p:par>
+                  <p:par>
+                    <p:cTn id="25" fill="hold">
+                      <p:stCondLst>
+                        <p:cond delay="indefinite"/>
+                      </p:stCondLst>
+                      <p:childTnLst>
+                        <p:par>
+                          <p:cTn id="26" fill="hold">
+                            <p:stCondLst>
+                              <p:cond delay="0"/>
+                            </p:stCondLst>
+                            <p:childTnLst>
+                              <p:par>
+                                <p:cTn id="27" presetID="10" presetClass="entr" presetSubtype="0" fill="hold" nodeType="clickEffect">
+                                  <p:stCondLst>
+                                    <p:cond delay="0"/>
+                                  </p:stCondLst>
+                                  <p:childTnLst>
+                                    <p:set>
+                                      <p:cBhvr>
+                                        <p:cTn id="28" dur="1" fill="hold">
+                                          <p:stCondLst>
+                                            <p:cond delay="0"/>
+                                          </p:stCondLst>
+                                        </p:cTn>
+                                        <p:tgtEl>
+                                          <p:spTgt spid="14"/>
+                                        </p:tgtEl>
+                                        <p:attrNameLst>
+                                          <p:attrName>style.visibility</p:attrName>
+                                        </p:attrNameLst>
+                                      </p:cBhvr>
+                                      <p:to>
+                                        <p:strVal val="visible"/>
+                                      </p:to>
+                                    </p:set>
+                                    <p:animEffect transition="in" filter="fade">
+                                      <p:cBhvr>
+                                        <p:cTn id="29" dur="500"/>
+                                        <p:tgtEl>
+                                          <p:spTgt spid="14"/>
+                                        </p:tgtEl>
+                                      </p:cBhvr>
+                                    </p:animEffect>
+                                  </p:childTnLst>
+                                </p:cTn>
+                              </p:par>
+                            </p:childTnLst>
+                          </p:cTn>
+                        </p:par>
+                        <p:par>
+                          <p:cTn id="30" fill="hold">
+                            <p:stCondLst>
+                              <p:cond delay="500"/>
+                            </p:stCondLst>
+                            <p:childTnLst>
+                              <p:par>
+                                <p:cTn id="31" presetID="10" presetClass="entr" presetSubtype="0" fill="hold" nodeType="afterEffect">
+                                  <p:stCondLst>
+                                    <p:cond delay="0"/>
+                                  </p:stCondLst>
+                                  <p:childTnLst>
+                                    <p:set>
+                                      <p:cBhvr>
+                                        <p:cTn id="32" dur="1" fill="hold">
+                                          <p:stCondLst>
+                                            <p:cond delay="0"/>
+                                          </p:stCondLst>
+                                        </p:cTn>
+                                        <p:tgtEl>
+                                          <p:spTgt spid="18"/>
+                                        </p:tgtEl>
+                                        <p:attrNameLst>
+                                          <p:attrName>style.visibility</p:attrName>
+                                        </p:attrNameLst>
+                                      </p:cBhvr>
+                                      <p:to>
+                                        <p:strVal val="visible"/>
+                                      </p:to>
+                                    </p:set>
+                                    <p:animEffect transition="in" filter="fade">
+                                      <p:cBhvr>
+                                        <p:cTn id="33" dur="500"/>
+                                        <p:tgtEl>
+                                          <p:spTgt spid="18"/>
+                                        </p:tgtEl>
+                                      </p:cBhvr>
+                                    </p:animEffect>
+                                  </p:childTnLst>
+                                </p:cTn>
+                              </p:par>
+                            </p:childTnLst>
+                          </p:cTn>
+                        </p:par>
+                      </p:childTnLst>
+                    </p:cTn>
+                  </p:par>
+                </p:childTnLst>
+              </p:cTn>
+              <p:prevCondLst>
+                <p:cond evt="onPrev" delay="0">
+                  <p:tgtEl>
+                    <p:sldTgt/>
+                  </p:tgtEl>
+                </p:cond>
+              </p:prevCondLst>
+              <p:nextCondLst>
+                <p:cond evt="onNext" delay="0">
+                  <p:tgtEl>
+                    <p:sldTgt/>
+                  </p:tgtEl>
+                </p:cond>
+              </p:nextCondLst>
+            </p:seq>
+          </p:childTnLst>
+        </p:cTn>
+      </p:par>
+    </p:tnLst>
+  </p:timing>
+</p:sld>
+</file>
+
+<file path=ppt/slides/slide6.xml><?xml version="1.0" encoding="utf-8"?>
 <p:sld xmlns:a="http://schemas.openxmlformats.org/drawingml/2006/main" xmlns:r="http://schemas.openxmlformats.org/officeDocument/2006/relationships" xmlns:p="http://schemas.openxmlformats.org/presentationml/2006/main" showMasterPhAnim="0">
   <p:cSld>
     <p:bg>
@@ -6320,7 +7102,7 @@
         <p:fade/>
       </p:transition>
     </mc:Choice>
-    <mc:Fallback xmlns="" xmlns:m="http://schemas.openxmlformats.org/officeDocument/2006/math" xmlns:w="http://schemas.openxmlformats.org/wordprocessingml/2006/main">
+    <mc:Fallback xmlns:w="http://schemas.openxmlformats.org/wordprocessingml/2006/main" xmlns:m="http://schemas.openxmlformats.org/officeDocument/2006/math" xmlns="">
       <p:transition spd="med" advClick="1">
         <p:fade thruBlk="0"/>
       </p:transition>
@@ -6723,7 +7505,7 @@
 </p:sld>
 </file>
 
-<file path=ppt/slides/slide6.xml><?xml version="1.0" encoding="utf-8"?>
+<file path=ppt/slides/slide7.xml><?xml version="1.0" encoding="utf-8"?>
 <p:sld xmlns:a="http://schemas.openxmlformats.org/drawingml/2006/main" xmlns:r="http://schemas.openxmlformats.org/officeDocument/2006/relationships" xmlns:p="http://schemas.openxmlformats.org/presentationml/2006/main" showMasterPhAnim="0">
   <p:cSld>
     <p:spTree>
@@ -6795,7 +7577,7 @@
         <p:fade/>
       </p:transition>
     </mc:Choice>
-    <mc:Fallback xmlns="" xmlns:m="http://schemas.openxmlformats.org/officeDocument/2006/math" xmlns:w="http://schemas.openxmlformats.org/wordprocessingml/2006/main">
+    <mc:Fallback xmlns:w="http://schemas.openxmlformats.org/wordprocessingml/2006/main" xmlns:m="http://schemas.openxmlformats.org/officeDocument/2006/math" xmlns="">
       <p:transition spd="med" advClick="1">
         <p:fade thruBlk="0"/>
       </p:transition>
@@ -6934,7 +7716,7 @@
 </p:sld>
 </file>
 
-<file path=ppt/slides/slide7.xml><?xml version="1.0" encoding="utf-8"?>
+<file path=ppt/slides/slide8.xml><?xml version="1.0" encoding="utf-8"?>
 <p:sld xmlns:a="http://schemas.openxmlformats.org/drawingml/2006/main" xmlns:r="http://schemas.openxmlformats.org/officeDocument/2006/relationships" xmlns:p="http://schemas.openxmlformats.org/presentationml/2006/main" showMasterPhAnim="0">
   <p:cSld>
     <p:spTree>
@@ -7006,7 +7788,7 @@
         <p:fade/>
       </p:transition>
     </mc:Choice>
-    <mc:Fallback xmlns="" xmlns:m="http://schemas.openxmlformats.org/officeDocument/2006/math" xmlns:w="http://schemas.openxmlformats.org/wordprocessingml/2006/main">
+    <mc:Fallback xmlns:w="http://schemas.openxmlformats.org/wordprocessingml/2006/main" xmlns:m="http://schemas.openxmlformats.org/officeDocument/2006/math" xmlns="">
       <p:transition spd="med" advClick="1">
         <p:fade thruBlk="0"/>
       </p:transition>
